--- a/03-build/pptx/C4_U6_alumno.pptx
+++ b/03-build/pptx/C4_U6_alumno.pptx
@@ -4204,7 +4204,6 @@
               <a:srgbClr val="D64550"/>
             </a:solidFill>
           </a:ln>
-          <a:effectLst/>
           <a:effectLst>
             <a:outerShdw blurRad="90000" dist="38000" dir="5400000" rotWithShape="0">
               <a:srgbClr val="20242E">
@@ -4370,7 +4369,6 @@
               <a:srgbClr val="E4E3DE"/>
             </a:solidFill>
           </a:ln>
-          <a:effectLst/>
           <a:effectLst>
             <a:outerShdw blurRad="90000" dist="38000" dir="5400000" rotWithShape="0">
               <a:srgbClr val="20242E">
@@ -5095,7 +5093,6 @@
               <a:srgbClr val="E4E3DE"/>
             </a:solidFill>
           </a:ln>
-          <a:effectLst/>
           <a:effectLst>
             <a:outerShdw blurRad="90000" dist="38000" dir="5400000" rotWithShape="0">
               <a:srgbClr val="20242E">
@@ -5239,7 +5236,6 @@
               <a:srgbClr val="E4E3DE"/>
             </a:solidFill>
           </a:ln>
-          <a:effectLst/>
           <a:effectLst>
             <a:outerShdw blurRad="90000" dist="38000" dir="5400000" rotWithShape="0">
               <a:srgbClr val="20242E">
@@ -5383,7 +5379,6 @@
               <a:srgbClr val="E4E3DE"/>
             </a:solidFill>
           </a:ln>
-          <a:effectLst/>
           <a:effectLst>
             <a:outerShdw blurRad="90000" dist="38000" dir="5400000" rotWithShape="0">
               <a:srgbClr val="20242E">
@@ -5527,7 +5522,6 @@
               <a:srgbClr val="E4E3DE"/>
             </a:solidFill>
           </a:ln>
-          <a:effectLst/>
           <a:effectLst>
             <a:outerShdw blurRad="90000" dist="38000" dir="5400000" rotWithShape="0">
               <a:srgbClr val="20242E">
@@ -5671,7 +5665,6 @@
               <a:srgbClr val="E4E3DE"/>
             </a:solidFill>
           </a:ln>
-          <a:effectLst/>
           <a:effectLst>
             <a:outerShdw blurRad="90000" dist="38000" dir="5400000" rotWithShape="0">
               <a:srgbClr val="20242E">
@@ -5815,7 +5808,6 @@
               <a:srgbClr val="E4E3DE"/>
             </a:solidFill>
           </a:ln>
-          <a:effectLst/>
           <a:effectLst>
             <a:outerShdw blurRad="90000" dist="38000" dir="5400000" rotWithShape="0">
               <a:srgbClr val="20242E">
@@ -5959,7 +5951,6 @@
               <a:srgbClr val="D64550"/>
             </a:solidFill>
           </a:ln>
-          <a:effectLst/>
           <a:effectLst>
             <a:outerShdw blurRad="90000" dist="38000" dir="5400000" rotWithShape="0">
               <a:srgbClr val="20242E">
@@ -6596,7 +6587,6 @@
               <a:srgbClr val="D64550"/>
             </a:solidFill>
           </a:ln>
-          <a:effectLst/>
           <a:effectLst>
             <a:outerShdw blurRad="90000" dist="38000" dir="5400000" rotWithShape="0">
               <a:srgbClr val="20242E">
@@ -6856,7 +6846,6 @@
               <a:srgbClr val="D64550"/>
             </a:solidFill>
           </a:ln>
-          <a:effectLst/>
           <a:effectLst>
             <a:outerShdw blurRad="90000" dist="38000" dir="5400000" rotWithShape="0">
               <a:srgbClr val="20242E">
@@ -7635,7 +7624,6 @@
               <a:srgbClr val="E4E3DE"/>
             </a:solidFill>
           </a:ln>
-          <a:effectLst/>
           <a:effectLst>
             <a:outerShdw blurRad="90000" dist="38000" dir="5400000" rotWithShape="0">
               <a:srgbClr val="20242E">
@@ -7789,7 +7777,6 @@
               <a:srgbClr val="E4E3DE"/>
             </a:solidFill>
           </a:ln>
-          <a:effectLst/>
           <a:effectLst>
             <a:outerShdw blurRad="90000" dist="38000" dir="5400000" rotWithShape="0">
               <a:srgbClr val="20242E">
@@ -7943,7 +7930,6 @@
               <a:srgbClr val="E4E3DE"/>
             </a:solidFill>
           </a:ln>
-          <a:effectLst/>
           <a:effectLst>
             <a:outerShdw blurRad="90000" dist="38000" dir="5400000" rotWithShape="0">
               <a:srgbClr val="20242E">
@@ -8097,7 +8083,6 @@
               <a:srgbClr val="E4E3DE"/>
             </a:solidFill>
           </a:ln>
-          <a:effectLst/>
           <a:effectLst>
             <a:outerShdw blurRad="90000" dist="38000" dir="5400000" rotWithShape="0">
               <a:srgbClr val="20242E">
@@ -8251,7 +8236,6 @@
               <a:srgbClr val="E4E3DE"/>
             </a:solidFill>
           </a:ln>
-          <a:effectLst/>
           <a:effectLst>
             <a:outerShdw blurRad="90000" dist="38000" dir="5400000" rotWithShape="0">
               <a:srgbClr val="20242E">
@@ -8405,7 +8389,6 @@
               <a:srgbClr val="E4E3DE"/>
             </a:solidFill>
           </a:ln>
-          <a:effectLst/>
           <a:effectLst>
             <a:outerShdw blurRad="90000" dist="38000" dir="5400000" rotWithShape="0">
               <a:srgbClr val="20242E">
@@ -8559,7 +8542,6 @@
               <a:srgbClr val="E4E3DE"/>
             </a:solidFill>
           </a:ln>
-          <a:effectLst/>
           <a:effectLst>
             <a:outerShdw blurRad="90000" dist="38000" dir="5400000" rotWithShape="0">
               <a:srgbClr val="20242E">
@@ -8713,7 +8695,6 @@
               <a:srgbClr val="E4E3DE"/>
             </a:solidFill>
           </a:ln>
-          <a:effectLst/>
           <a:effectLst>
             <a:outerShdw blurRad="90000" dist="38000" dir="5400000" rotWithShape="0">
               <a:srgbClr val="20242E">
@@ -8867,7 +8848,6 @@
               <a:srgbClr val="E4E3DE"/>
             </a:solidFill>
           </a:ln>
-          <a:effectLst/>
           <a:effectLst>
             <a:outerShdw blurRad="90000" dist="38000" dir="5400000" rotWithShape="0">
               <a:srgbClr val="20242E">
@@ -9021,7 +9001,6 @@
               <a:srgbClr val="E4E3DE"/>
             </a:solidFill>
           </a:ln>
-          <a:effectLst/>
           <a:effectLst>
             <a:outerShdw blurRad="90000" dist="38000" dir="5400000" rotWithShape="0">
               <a:srgbClr val="20242E">
@@ -9175,7 +9154,6 @@
               <a:srgbClr val="E4E3DE"/>
             </a:solidFill>
           </a:ln>
-          <a:effectLst/>
           <a:effectLst>
             <a:outerShdw blurRad="90000" dist="38000" dir="5400000" rotWithShape="0">
               <a:srgbClr val="20242E">
@@ -9329,7 +9307,6 @@
               <a:srgbClr val="E4E3DE"/>
             </a:solidFill>
           </a:ln>
-          <a:effectLst/>
           <a:effectLst>
             <a:outerShdw blurRad="90000" dist="38000" dir="5400000" rotWithShape="0">
               <a:srgbClr val="20242E">
@@ -9483,7 +9460,6 @@
               <a:srgbClr val="D64550"/>
             </a:solidFill>
           </a:ln>
-          <a:effectLst/>
           <a:effectLst>
             <a:outerShdw blurRad="90000" dist="38000" dir="5400000" rotWithShape="0">
               <a:srgbClr val="20242E">
@@ -9637,7 +9613,6 @@
               <a:srgbClr val="D64550"/>
             </a:solidFill>
           </a:ln>
-          <a:effectLst/>
           <a:effectLst>
             <a:outerShdw blurRad="90000" dist="38000" dir="5400000" rotWithShape="0">
               <a:srgbClr val="20242E">
@@ -10274,7 +10249,6 @@
               <a:srgbClr val="E4E3DE"/>
             </a:solidFill>
           </a:ln>
-          <a:effectLst/>
           <a:effectLst>
             <a:outerShdw blurRad="90000" dist="38000" dir="5400000" rotWithShape="0">
               <a:srgbClr val="20242E">
@@ -10550,7 +10524,6 @@
               <a:srgbClr val="D64550"/>
             </a:solidFill>
           </a:ln>
-          <a:effectLst/>
           <a:effectLst>
             <a:outerShdw blurRad="90000" dist="38000" dir="5400000" rotWithShape="0">
               <a:srgbClr val="20242E">
@@ -11472,7 +11445,6 @@
               <a:srgbClr val="E4E3DE"/>
             </a:solidFill>
           </a:ln>
-          <a:effectLst/>
           <a:effectLst>
             <a:outerShdw blurRad="90000" dist="38000" dir="5400000" rotWithShape="0">
               <a:srgbClr val="20242E">
@@ -11641,7 +11613,6 @@
               <a:srgbClr val="E4E3DE"/>
             </a:solidFill>
           </a:ln>
-          <a:effectLst/>
           <a:effectLst>
             <a:outerShdw blurRad="90000" dist="38000" dir="5400000" rotWithShape="0">
               <a:srgbClr val="20242E">
@@ -11810,7 +11781,6 @@
               <a:srgbClr val="E4E3DE"/>
             </a:solidFill>
           </a:ln>
-          <a:effectLst/>
           <a:effectLst>
             <a:outerShdw blurRad="90000" dist="38000" dir="5400000" rotWithShape="0">
               <a:srgbClr val="20242E">
@@ -11979,7 +11949,6 @@
               <a:srgbClr val="E4E3DE"/>
             </a:solidFill>
           </a:ln>
-          <a:effectLst/>
           <a:effectLst>
             <a:outerShdw blurRad="90000" dist="38000" dir="5400000" rotWithShape="0">
               <a:srgbClr val="20242E">
@@ -12148,7 +12117,6 @@
               <a:srgbClr val="E4E3DE"/>
             </a:solidFill>
           </a:ln>
-          <a:effectLst/>
           <a:effectLst>
             <a:outerShdw blurRad="90000" dist="38000" dir="5400000" rotWithShape="0">
               <a:srgbClr val="20242E">
@@ -12317,7 +12285,6 @@
               <a:srgbClr val="E4E3DE"/>
             </a:solidFill>
           </a:ln>
-          <a:effectLst/>
           <a:effectLst>
             <a:outerShdw blurRad="90000" dist="38000" dir="5400000" rotWithShape="0">
               <a:srgbClr val="20242E">
@@ -12486,7 +12453,6 @@
               <a:srgbClr val="E4E3DE"/>
             </a:solidFill>
           </a:ln>
-          <a:effectLst/>
           <a:effectLst>
             <a:outerShdw blurRad="90000" dist="38000" dir="5400000" rotWithShape="0">
               <a:srgbClr val="20242E">
@@ -12655,7 +12621,6 @@
               <a:srgbClr val="E4E3DE"/>
             </a:solidFill>
           </a:ln>
-          <a:effectLst/>
           <a:effectLst>
             <a:outerShdw blurRad="90000" dist="38000" dir="5400000" rotWithShape="0">
               <a:srgbClr val="20242E">
@@ -12824,7 +12789,6 @@
               <a:srgbClr val="E4E3DE"/>
             </a:solidFill>
           </a:ln>
-          <a:effectLst/>
           <a:effectLst>
             <a:outerShdw blurRad="90000" dist="38000" dir="5400000" rotWithShape="0">
               <a:srgbClr val="20242E">
@@ -13573,7 +13537,6 @@
               <a:srgbClr val="E4E3DE"/>
             </a:solidFill>
           </a:ln>
-          <a:effectLst/>
           <a:effectLst>
             <a:outerShdw blurRad="90000" dist="38000" dir="5400000" rotWithShape="0">
               <a:srgbClr val="20242E">
@@ -14428,7 +14391,6 @@
               <a:srgbClr val="D64550"/>
             </a:solidFill>
           </a:ln>
-          <a:effectLst/>
           <a:effectLst>
             <a:outerShdw blurRad="90000" dist="38000" dir="5400000" rotWithShape="0">
               <a:srgbClr val="20242E">
@@ -15177,7 +15139,6 @@
               <a:srgbClr val="E4E3DE"/>
             </a:solidFill>
           </a:ln>
-          <a:effectLst/>
           <a:effectLst>
             <a:outerShdw blurRad="90000" dist="38000" dir="5400000" rotWithShape="0">
               <a:srgbClr val="20242E">
@@ -15388,7 +15349,6 @@
               <a:srgbClr val="E4E3DE"/>
             </a:solidFill>
           </a:ln>
-          <a:effectLst/>
           <a:effectLst>
             <a:outerShdw blurRad="90000" dist="38000" dir="5400000" rotWithShape="0">
               <a:srgbClr val="20242E">
@@ -15599,7 +15559,6 @@
               <a:srgbClr val="D64550"/>
             </a:solidFill>
           </a:ln>
-          <a:effectLst/>
           <a:effectLst>
             <a:outerShdw blurRad="90000" dist="38000" dir="5400000" rotWithShape="0">
               <a:srgbClr val="20242E">
@@ -16515,7 +16474,6 @@
               <a:srgbClr val="E4E3DE"/>
             </a:solidFill>
           </a:ln>
-          <a:effectLst/>
           <a:effectLst>
             <a:outerShdw blurRad="90000" dist="38000" dir="5400000" rotWithShape="0">
               <a:srgbClr val="20242E">
@@ -16885,7 +16843,6 @@
               <a:srgbClr val="E4E3DE"/>
             </a:solidFill>
           </a:ln>
-          <a:effectLst/>
           <a:effectLst>
             <a:outerShdw blurRad="90000" dist="38000" dir="5400000" rotWithShape="0">
               <a:srgbClr val="20242E">
@@ -17255,7 +17212,6 @@
               <a:srgbClr val="E4E3DE"/>
             </a:solidFill>
           </a:ln>
-          <a:effectLst/>
           <a:effectLst>
             <a:outerShdw blurRad="90000" dist="38000" dir="5400000" rotWithShape="0">
               <a:srgbClr val="20242E">
@@ -18153,7 +18109,6 @@
               <a:srgbClr val="D64550"/>
             </a:solidFill>
           </a:ln>
-          <a:effectLst/>
           <a:effectLst>
             <a:outerShdw blurRad="90000" dist="38000" dir="5400000" rotWithShape="0">
               <a:srgbClr val="20242E">
@@ -18523,7 +18478,6 @@
               <a:srgbClr val="E4E3DE"/>
             </a:solidFill>
           </a:ln>
-          <a:effectLst/>
           <a:effectLst>
             <a:outerShdw blurRad="90000" dist="38000" dir="5400000" rotWithShape="0">
               <a:srgbClr val="20242E">
@@ -19975,7 +19929,6 @@
               <a:srgbClr val="E4E3DE"/>
             </a:solidFill>
           </a:ln>
-          <a:effectLst/>
           <a:effectLst>
             <a:outerShdw blurRad="90000" dist="38000" dir="5400000" rotWithShape="0">
               <a:srgbClr val="20242E">
@@ -20453,7 +20406,6 @@
               <a:srgbClr val="D64550"/>
             </a:solidFill>
           </a:ln>
-          <a:effectLst/>
           <a:effectLst>
             <a:outerShdw blurRad="90000" dist="38000" dir="5400000" rotWithShape="0">
               <a:srgbClr val="20242E">
@@ -21340,7 +21292,6 @@
               <a:srgbClr val="E4E3DE"/>
             </a:solidFill>
           </a:ln>
-          <a:effectLst/>
           <a:effectLst>
             <a:outerShdw blurRad="90000" dist="38000" dir="5400000" rotWithShape="0">
               <a:srgbClr val="20242E">
@@ -21629,7 +21580,6 @@
               <a:srgbClr val="D64550"/>
             </a:solidFill>
           </a:ln>
-          <a:effectLst/>
           <a:effectLst>
             <a:outerShdw blurRad="90000" dist="38000" dir="5400000" rotWithShape="0">
               <a:srgbClr val="20242E">
@@ -21903,7 +21853,6 @@
               <a:srgbClr val="D64550"/>
             </a:solidFill>
           </a:ln>
-          <a:effectLst/>
           <a:effectLst>
             <a:outerShdw blurRad="90000" dist="38000" dir="5400000" rotWithShape="0">
               <a:srgbClr val="20242E">
@@ -23016,7 +22965,6 @@
               <a:srgbClr val="E4E3DE"/>
             </a:solidFill>
           </a:ln>
-          <a:effectLst/>
           <a:effectLst>
             <a:outerShdw blurRad="90000" dist="38000" dir="5400000" rotWithShape="0">
               <a:srgbClr val="20242E">
